--- a/skills/make-figures/references/exemplar_diagrams/strobe/template_output.pptx
+++ b/skills/make-figures/references/exemplar_diagrams/strobe/template_output.pptx
@@ -3729,6 +3729,7 @@
             <a:solidFill>
               <a:srgbClr val="000000"/>
             </a:solidFill>
+            <a:prstDash val="dash"/>
           </a:ln>
         </p:spPr>
         <p:style>
@@ -3749,7 +3750,7 @@
           <a:bodyPr rtlCol="0" anchor="ctr" wrap="square" tIns="54864" bIns="54864"/>
           <a:lstStyle/>
           <a:p>
-            <a:pPr algn="ctr"/>
+            <a:pPr algn="l"/>
             <a:r>
               <a:rPr sz="1000" b="0">
                 <a:solidFill>
@@ -3760,6 +3761,7 @@
             </a:r>
           </a:p>
           <a:p>
+            <a:pPr algn="l"/>
             <a:r>
               <a:rPr sz="1000" b="0">
                 <a:solidFill>
@@ -3770,6 +3772,7 @@
             </a:r>
           </a:p>
           <a:p>
+            <a:pPr algn="l"/>
             <a:r>
               <a:rPr sz="1000" b="0">
                 <a:solidFill>
@@ -3838,6 +3841,7 @@
             <a:solidFill>
               <a:srgbClr val="000000"/>
             </a:solidFill>
+            <a:prstDash val="dash"/>
           </a:ln>
         </p:spPr>
         <p:style>
@@ -3858,7 +3862,7 @@
           <a:bodyPr rtlCol="0" anchor="ctr" wrap="square" tIns="54864" bIns="54864"/>
           <a:lstStyle/>
           <a:p>
-            <a:pPr algn="ctr"/>
+            <a:pPr algn="l"/>
             <a:r>
               <a:rPr sz="1000" b="0">
                 <a:solidFill>
@@ -3869,6 +3873,7 @@
             </a:r>
           </a:p>
           <a:p>
+            <a:pPr algn="l"/>
             <a:r>
               <a:rPr sz="1000" b="0">
                 <a:solidFill>
@@ -3879,6 +3884,7 @@
             </a:r>
           </a:p>
           <a:p>
+            <a:pPr algn="l"/>
             <a:r>
               <a:rPr sz="1000" b="0">
                 <a:solidFill>

--- a/skills/make-figures/references/exemplar_diagrams/strobe/template_output.pptx
+++ b/skills/make-figures/references/exemplar_diagrams/strobe/template_output.pptx
@@ -3130,7 +3130,7 @@
         <p:spPr>
           <a:xfrm>
             <a:off x="365760" y="1005840"/>
-            <a:ext cx="1371600" cy="960120"/>
+            <a:ext cx="1280160" cy="1097279"/>
           </a:xfrm>
           <a:prstGeom prst="roundRect">
             <a:avLst/>
@@ -3182,8 +3182,8 @@
         </p:nvSpPr>
         <p:spPr>
           <a:xfrm>
-            <a:off x="365760" y="2240280"/>
-            <a:ext cx="1371600" cy="960119"/>
+            <a:off x="365760" y="2423160"/>
+            <a:ext cx="1280160" cy="1097279"/>
           </a:xfrm>
           <a:prstGeom prst="roundRect">
             <a:avLst/>
@@ -3235,8 +3235,8 @@
         </p:nvSpPr>
         <p:spPr>
           <a:xfrm>
-            <a:off x="365760" y="3474720"/>
-            <a:ext cx="1371600" cy="960120"/>
+            <a:off x="365760" y="3840479"/>
+            <a:ext cx="1280160" cy="1097280"/>
           </a:xfrm>
           <a:prstGeom prst="roundRect">
             <a:avLst/>
@@ -3288,8 +3288,8 @@
         </p:nvSpPr>
         <p:spPr>
           <a:xfrm>
-            <a:off x="365760" y="4709160"/>
-            <a:ext cx="1371600" cy="960119"/>
+            <a:off x="365760" y="5257800"/>
+            <a:ext cx="1280160" cy="1097280"/>
           </a:xfrm>
           <a:prstGeom prst="roundRect">
             <a:avLst/>
@@ -3341,8 +3341,8 @@
         </p:nvSpPr>
         <p:spPr>
           <a:xfrm>
-            <a:off x="2194560" y="1005840"/>
-            <a:ext cx="4023360" cy="960120"/>
+            <a:off x="2011680" y="1005840"/>
+            <a:ext cx="3291840" cy="1097280"/>
           </a:xfrm>
           <a:prstGeom prst="roundRect">
             <a:avLst/>
@@ -3416,8 +3416,8 @@
         </p:nvSpPr>
         <p:spPr>
           <a:xfrm>
-            <a:off x="2194560" y="2240280"/>
-            <a:ext cx="4023360" cy="960120"/>
+            <a:off x="2011680" y="2423160"/>
+            <a:ext cx="3291840" cy="1097280"/>
           </a:xfrm>
           <a:prstGeom prst="roundRect">
             <a:avLst/>
@@ -3480,8 +3480,8 @@
         </p:nvCxnSpPr>
         <p:spPr>
           <a:xfrm>
-            <a:off x="4206240" y="1965960"/>
-            <a:ext cx="0" cy="274320"/>
+            <a:off x="3657600" y="2103120"/>
+            <a:ext cx="0" cy="320040"/>
           </a:xfrm>
           <a:prstGeom prst="line">
             <a:avLst/>
@@ -3516,8 +3516,8 @@
         </p:nvSpPr>
         <p:spPr>
           <a:xfrm>
-            <a:off x="2194560" y="3474720"/>
-            <a:ext cx="4023360" cy="960120"/>
+            <a:off x="2011680" y="3840479"/>
+            <a:ext cx="3291840" cy="1097280"/>
           </a:xfrm>
           <a:prstGeom prst="roundRect">
             <a:avLst/>
@@ -3580,8 +3580,8 @@
         </p:nvCxnSpPr>
         <p:spPr>
           <a:xfrm>
-            <a:off x="4206240" y="3200400"/>
-            <a:ext cx="0" cy="274320"/>
+            <a:off x="3657600" y="3520439"/>
+            <a:ext cx="0" cy="320040"/>
           </a:xfrm>
           <a:prstGeom prst="line">
             <a:avLst/>
@@ -3616,8 +3616,8 @@
         </p:nvSpPr>
         <p:spPr>
           <a:xfrm>
-            <a:off x="2194560" y="4709160"/>
-            <a:ext cx="4023360" cy="960120"/>
+            <a:off x="2011680" y="5257800"/>
+            <a:ext cx="3291840" cy="1097280"/>
           </a:xfrm>
           <a:prstGeom prst="roundRect">
             <a:avLst/>
@@ -3680,8 +3680,8 @@
         </p:nvCxnSpPr>
         <p:spPr>
           <a:xfrm>
-            <a:off x="4206240" y="4434840"/>
-            <a:ext cx="0" cy="274320"/>
+            <a:off x="3657600" y="4937759"/>
+            <a:ext cx="0" cy="320041"/>
           </a:xfrm>
           <a:prstGeom prst="line">
             <a:avLst/>
@@ -3716,8 +3716,8 @@
         </p:nvSpPr>
         <p:spPr>
           <a:xfrm>
-            <a:off x="6766560" y="2240280"/>
-            <a:ext cx="4206240" cy="868680"/>
+            <a:off x="5852160" y="2491740"/>
+            <a:ext cx="3383280" cy="960120"/>
           </a:xfrm>
           <a:prstGeom prst="roundRect">
             <a:avLst/>
@@ -3768,7 +3768,7 @@
                   <a:srgbClr val="000000"/>
                 </a:solidFill>
               </a:rPr>
-              <a:t>♦ missing age/sex (n = 1,200)</a:t>
+              <a:t>- missing age/sex (n = 1,200)</a:t>
             </a:r>
           </a:p>
           <a:p>
@@ -3779,7 +3779,7 @@
                   <a:srgbClr val="000000"/>
                 </a:solidFill>
               </a:rPr>
-              <a:t>♦ outside age range (n = 3,800)</a:t>
+              <a:t>- outside age range (n = 3,800)</a:t>
             </a:r>
           </a:p>
         </p:txBody>
@@ -3791,9 +3791,9 @@
           <p:nvPr/>
         </p:nvCxnSpPr>
         <p:spPr>
-          <a:xfrm flipV="1">
-            <a:off x="6217920" y="2674620"/>
-            <a:ext cx="548640" cy="45720"/>
+          <a:xfrm>
+            <a:off x="5303520" y="2971800"/>
+            <a:ext cx="548640" cy="0"/>
           </a:xfrm>
           <a:prstGeom prst="line">
             <a:avLst/>
@@ -3828,8 +3828,8 @@
         </p:nvSpPr>
         <p:spPr>
           <a:xfrm>
-            <a:off x="6766560" y="3474720"/>
-            <a:ext cx="4206240" cy="868680"/>
+            <a:off x="5852160" y="3909059"/>
+            <a:ext cx="3383280" cy="960120"/>
           </a:xfrm>
           <a:prstGeom prst="roundRect">
             <a:avLst/>
@@ -3880,7 +3880,7 @@
                   <a:srgbClr val="000000"/>
                 </a:solidFill>
               </a:rPr>
-              <a:t>♦ prior event at baseline (n = 1,500)</a:t>
+              <a:t>- prior event at baseline (n = 1,500)</a:t>
             </a:r>
           </a:p>
           <a:p>
@@ -3891,7 +3891,7 @@
                   <a:srgbClr val="000000"/>
                 </a:solidFill>
               </a:rPr>
-              <a:t>♦ follow-up ≤ 0 days (n = 1,000)</a:t>
+              <a:t>- follow-up ≤ 0 days (n = 1,000)</a:t>
             </a:r>
           </a:p>
         </p:txBody>
@@ -3903,9 +3903,9 @@
           <p:nvPr/>
         </p:nvCxnSpPr>
         <p:spPr>
-          <a:xfrm flipV="1">
-            <a:off x="6217920" y="3909060"/>
-            <a:ext cx="548640" cy="45720"/>
+          <a:xfrm>
+            <a:off x="5303520" y="4389119"/>
+            <a:ext cx="548640" cy="0"/>
           </a:xfrm>
           <a:prstGeom prst="line">
             <a:avLst/>
